--- a/Documents/SalesAnalysis_FrameWork.pptx
+++ b/Documents/SalesAnalysis_FrameWork.pptx
@@ -14,8 +14,8 @@
     <p:sldId id="260" r:id="rId5"/>
     <p:sldId id="261" r:id="rId6"/>
     <p:sldId id="262" r:id="rId7"/>
-    <p:sldId id="263" r:id="rId8"/>
-    <p:sldId id="264" r:id="rId9"/>
+    <p:sldId id="264" r:id="rId8"/>
+    <p:sldId id="263" r:id="rId9"/>
     <p:sldId id="266" r:id="rId10"/>
   </p:sldIdLst>
   <p:sldSz cx="12192000" cy="6858000"/>
@@ -126,6 +126,7 @@
 <file path=ppt/revisionInfo.xml><?xml version="1.0" encoding="utf-8"?>
 <p1510:revInfo xmlns:a="http://schemas.openxmlformats.org/drawingml/2006/main" xmlns:r="http://schemas.openxmlformats.org/officeDocument/2006/relationships" xmlns:p1510="http://schemas.microsoft.com/office/powerpoint/2015/10/main">
   <p1510:revLst>
+    <p1510:client id="{2B2209F0-BDE7-45E7-803F-D0546AA3A300}" v="1" dt="2026-03-06T11:18:55.725"/>
     <p1510:client id="{912109E2-55E3-4DE1-90FF-B564DE695E44}" v="72" dt="2026-03-06T07:37:43.733"/>
     <p1510:client id="{AD710007-99E5-4D0E-87C7-B7CFF48C7ABB}" v="44" dt="2026-03-06T02:49:07.537"/>
   </p1510:revLst>
@@ -137,7 +138,7 @@
   <pc:docChgLst>
     <pc:chgData name="bharath u" userId="c58c4ed255503daa" providerId="LiveId" clId="{5F7C9199-54C3-4129-A0AC-0FF32D78B41F}"/>
     <pc:docChg chg="undo custSel addSld delSld modSld sldOrd">
-      <pc:chgData name="bharath u" userId="c58c4ed255503daa" providerId="LiveId" clId="{5F7C9199-54C3-4129-A0AC-0FF32D78B41F}" dt="2026-03-06T07:37:48.399" v="794" actId="1076"/>
+      <pc:chgData name="bharath u" userId="c58c4ed255503daa" providerId="LiveId" clId="{5F7C9199-54C3-4129-A0AC-0FF32D78B41F}" dt="2026-03-06T11:18:57.241" v="801" actId="20577"/>
       <pc:docMkLst>
         <pc:docMk/>
       </pc:docMkLst>
@@ -205,7 +206,7 @@
         </pc:graphicFrameChg>
       </pc:sldChg>
       <pc:sldChg chg="addSp modSp mod">
-        <pc:chgData name="bharath u" userId="c58c4ed255503daa" providerId="LiveId" clId="{5F7C9199-54C3-4129-A0AC-0FF32D78B41F}" dt="2026-03-06T05:42:25.987" v="153" actId="113"/>
+        <pc:chgData name="bharath u" userId="c58c4ed255503daa" providerId="LiveId" clId="{5F7C9199-54C3-4129-A0AC-0FF32D78B41F}" dt="2026-03-06T11:18:57.241" v="801" actId="20577"/>
         <pc:sldMkLst>
           <pc:docMk/>
           <pc:sldMk cId="3816891389" sldId="258"/>
@@ -219,7 +220,7 @@
           </ac:spMkLst>
         </pc:spChg>
         <pc:spChg chg="mod">
-          <ac:chgData name="bharath u" userId="c58c4ed255503daa" providerId="LiveId" clId="{5F7C9199-54C3-4129-A0AC-0FF32D78B41F}" dt="2026-03-06T05:34:27.496" v="90"/>
+          <ac:chgData name="bharath u" userId="c58c4ed255503daa" providerId="LiveId" clId="{5F7C9199-54C3-4129-A0AC-0FF32D78B41F}" dt="2026-03-06T11:18:57.241" v="801" actId="20577"/>
           <ac:spMkLst>
             <pc:docMk/>
             <pc:sldMk cId="3816891389" sldId="258"/>
@@ -550,8 +551,8 @@
           </ac:spMkLst>
         </pc:spChg>
       </pc:sldChg>
-      <pc:sldChg chg="modSp mod">
-        <pc:chgData name="bharath u" userId="c58c4ed255503daa" providerId="LiveId" clId="{5F7C9199-54C3-4129-A0AC-0FF32D78B41F}" dt="2026-03-06T06:16:04.041" v="682" actId="6549"/>
+      <pc:sldChg chg="modSp mod ord">
+        <pc:chgData name="bharath u" userId="c58c4ed255503daa" providerId="LiveId" clId="{5F7C9199-54C3-4129-A0AC-0FF32D78B41F}" dt="2026-03-06T11:18:20.316" v="796"/>
         <pc:sldMkLst>
           <pc:docMk/>
           <pc:sldMk cId="3080688197" sldId="264"/>
@@ -566,11 +567,19 @@
         </pc:spChg>
       </pc:sldChg>
       <pc:sldChg chg="addSp delSp modSp mod">
-        <pc:chgData name="bharath u" userId="c58c4ed255503daa" providerId="LiveId" clId="{5F7C9199-54C3-4129-A0AC-0FF32D78B41F}" dt="2026-03-06T07:37:48.399" v="794" actId="1076"/>
+        <pc:chgData name="bharath u" userId="c58c4ed255503daa" providerId="LiveId" clId="{5F7C9199-54C3-4129-A0AC-0FF32D78B41F}" dt="2026-03-06T11:18:46.031" v="799" actId="478"/>
         <pc:sldMkLst>
           <pc:docMk/>
           <pc:sldMk cId="1779968709" sldId="266"/>
         </pc:sldMkLst>
+        <pc:spChg chg="mod">
+          <ac:chgData name="bharath u" userId="c58c4ed255503daa" providerId="LiveId" clId="{5F7C9199-54C3-4129-A0AC-0FF32D78B41F}" dt="2026-03-06T11:18:40.429" v="797" actId="6549"/>
+          <ac:spMkLst>
+            <pc:docMk/>
+            <pc:sldMk cId="1779968709" sldId="266"/>
+            <ac:spMk id="2" creationId="{B55AA201-B186-F09F-4E90-700D2B30FFB9}"/>
+          </ac:spMkLst>
+        </pc:spChg>
         <pc:spChg chg="mod">
           <ac:chgData name="bharath u" userId="c58c4ed255503daa" providerId="LiveId" clId="{5F7C9199-54C3-4129-A0AC-0FF32D78B41F}" dt="2026-03-06T07:36:48.323" v="792" actId="6549"/>
           <ac:spMkLst>
@@ -587,8 +596,8 @@
             <ac:graphicFrameMk id="6" creationId="{26CFDC0F-8C98-1A74-235B-EDB6A13C002B}"/>
           </ac:graphicFrameMkLst>
         </pc:graphicFrameChg>
-        <pc:graphicFrameChg chg="add mod">
-          <ac:chgData name="bharath u" userId="c58c4ed255503daa" providerId="LiveId" clId="{5F7C9199-54C3-4129-A0AC-0FF32D78B41F}" dt="2026-03-06T07:37:48.399" v="794" actId="1076"/>
+        <pc:graphicFrameChg chg="add del mod">
+          <ac:chgData name="bharath u" userId="c58c4ed255503daa" providerId="LiveId" clId="{5F7C9199-54C3-4129-A0AC-0FF32D78B41F}" dt="2026-03-06T11:18:46.031" v="799" actId="478"/>
           <ac:graphicFrameMkLst>
             <pc:docMk/>
             <pc:sldMk cId="1779968709" sldId="266"/>
@@ -1742,7 +1751,7 @@
           <a:p>
             <a:fld id="{510B4EF8-4605-4F6C-BFBA-E898EECCB94F}" type="slidenum">
               <a:rPr lang="en-US" smtClean="0"/>
-              <a:t>7</a:t>
+              <a:t>8</a:t>
             </a:fld>
             <a:endParaRPr lang="en-US"/>
           </a:p>
@@ -5999,7 +6008,7 @@
             </a:pPr>
             <a:r>
               <a:rPr lang="en-US" sz="2500" dirty="0"/>
-              <a:t>Solution Overview</a:t>
+              <a:t>High‑Level Architecture</a:t>
             </a:r>
           </a:p>
           <a:p>
@@ -6012,7 +6021,7 @@
             </a:pPr>
             <a:r>
               <a:rPr lang="en-US" sz="2500" dirty="0"/>
-              <a:t>Architecture &amp; Data Pipeline</a:t>
+              <a:t>Architecture Walkthrough</a:t>
             </a:r>
           </a:p>
           <a:p>
@@ -6025,7 +6034,7 @@
             </a:pPr>
             <a:r>
               <a:rPr lang="en-US" sz="2500" dirty="0"/>
-              <a:t>Design Components</a:t>
+              <a:t>Code Repo &amp; Deployment</a:t>
             </a:r>
           </a:p>
           <a:p>
@@ -6038,7 +6047,7 @@
             </a:pPr>
             <a:r>
               <a:rPr lang="en-US" sz="2500" dirty="0"/>
-              <a:t>Code Repository &amp; Deployment</a:t>
+              <a:t>Scalability</a:t>
             </a:r>
           </a:p>
           <a:p>
@@ -6051,7 +6060,7 @@
             </a:pPr>
             <a:r>
               <a:rPr lang="en-US" sz="2500" dirty="0"/>
-              <a:t>Scalability &amp; Enhancements</a:t>
+              <a:t>Improvements/Open Items</a:t>
             </a:r>
           </a:p>
           <a:p>
@@ -6064,7 +6073,7 @@
             </a:pPr>
             <a:r>
               <a:rPr lang="en-US" sz="2500" dirty="0"/>
-              <a:t>Open Items &amp; Next Steps</a:t>
+              <a:t>Additional Documentation</a:t>
             </a:r>
           </a:p>
         </p:txBody>
@@ -7839,7 +7848,7 @@
           <p:cNvPr id="2" name="Title 1">
             <a:extLst>
               <a:ext uri="{FF2B5EF4-FFF2-40B4-BE49-F238E27FC236}">
-                <a16:creationId xmlns:a16="http://schemas.microsoft.com/office/drawing/2014/main" id="{C1E1388F-032E-A62F-6523-BC89A0CCA962}"/>
+                <a16:creationId xmlns:a16="http://schemas.microsoft.com/office/drawing/2014/main" id="{4B329354-99E0-A37A-5E65-73AC8597F050}"/>
               </a:ext>
             </a:extLst>
           </p:cNvPr>
@@ -7857,7 +7866,7 @@
           <a:p>
             <a:r>
               <a:rPr lang="en-US" dirty="0"/>
-              <a:t>Improvements/Open Items</a:t>
+              <a:t>Scalability</a:t>
             </a:r>
           </a:p>
         </p:txBody>
@@ -7867,7 +7876,7 @@
           <p:cNvPr id="3" name="Content Placeholder 2">
             <a:extLst>
               <a:ext uri="{FF2B5EF4-FFF2-40B4-BE49-F238E27FC236}">
-                <a16:creationId xmlns:a16="http://schemas.microsoft.com/office/drawing/2014/main" id="{448B38BD-EBC0-FCE6-0D53-05C3838FC384}"/>
+                <a16:creationId xmlns:a16="http://schemas.microsoft.com/office/drawing/2014/main" id="{3C94D4B2-F219-D30B-B97F-3DF9AC496B76}"/>
               </a:ext>
             </a:extLst>
           </p:cNvPr>
@@ -7891,7 +7900,7 @@
             </a:pPr>
             <a:r>
               <a:rPr lang="en-US" dirty="0"/>
-              <a:t>Introduce SQS/SNS for buffering and notifications</a:t>
+              <a:t>AWS Glue with Spark for large datasets</a:t>
             </a:r>
           </a:p>
           <a:p>
@@ -7901,7 +7910,7 @@
             </a:pPr>
             <a:r>
               <a:rPr lang="en-US" dirty="0"/>
-              <a:t>Expand DynamoDB metadata model</a:t>
+              <a:t>Dynamic Spark configuration based on file size</a:t>
             </a:r>
           </a:p>
           <a:p>
@@ -7911,7 +7920,27 @@
             </a:pPr>
             <a:r>
               <a:rPr lang="en-US" dirty="0"/>
-              <a:t>Support multiple input files using manifest files</a:t>
+              <a:t>Streaming Option </a:t>
+            </a:r>
+          </a:p>
+          <a:p>
+            <a:pPr lvl="2">
+              <a:buFont typeface="Arial" panose="020B0604020202020204" pitchFamily="34" charset="0"/>
+              <a:buChar char="•"/>
+            </a:pPr>
+            <a:r>
+              <a:rPr lang="en-US" dirty="0"/>
+              <a:t>Kinesis → Lambda → Step Functions → Glue Streaming → S3 → DynamoDB</a:t>
+            </a:r>
+          </a:p>
+          <a:p>
+            <a:pPr lvl="2">
+              <a:buFont typeface="Arial" panose="020B0604020202020204" pitchFamily="34" charset="0"/>
+              <a:buChar char="•"/>
+            </a:pPr>
+            <a:r>
+              <a:rPr lang="en-US" dirty="0"/>
+              <a:t>Reliability &amp; Monitoring</a:t>
             </a:r>
           </a:p>
           <a:p>
@@ -7921,7 +7950,7 @@
             </a:pPr>
             <a:r>
               <a:rPr lang="en-US" dirty="0"/>
-              <a:t>Handle different file formats (parquet), multiple delimiters (comma, pipe)</a:t>
+              <a:t>CloudWatch metrics and alarms</a:t>
             </a:r>
           </a:p>
           <a:p>
@@ -7931,7 +7960,7 @@
             </a:pPr>
             <a:r>
               <a:rPr lang="en-US" dirty="0"/>
-              <a:t>Schema validation using Glue Catalog &amp; Crawlers</a:t>
+              <a:t>SNS notifications</a:t>
             </a:r>
           </a:p>
           <a:p>
@@ -7941,7 +7970,7 @@
             </a:pPr>
             <a:r>
               <a:rPr lang="en-US" dirty="0"/>
-              <a:t>Data quality checks on output data</a:t>
+              <a:t>Lambda retry policies</a:t>
             </a:r>
           </a:p>
           <a:p>
@@ -7951,52 +7980,16 @@
             </a:pPr>
             <a:r>
               <a:rPr lang="en-US" dirty="0"/>
-              <a:t>Standardize product naming and keywords</a:t>
-            </a:r>
-          </a:p>
-          <a:p>
-            <a:pPr lvl="1">
-              <a:buFont typeface="Arial" panose="020B0604020202020204" pitchFamily="34" charset="0"/>
-              <a:buChar char="•"/>
-            </a:pPr>
-            <a:r>
-              <a:rPr lang="en-US" dirty="0"/>
-              <a:t>Improve logging, tagging, and retention</a:t>
-            </a:r>
-          </a:p>
-          <a:p>
-            <a:pPr lvl="1">
-              <a:buFont typeface="Arial" panose="020B0604020202020204" pitchFamily="34" charset="0"/>
-              <a:buChar char="•"/>
-            </a:pPr>
-            <a:r>
-              <a:rPr lang="en-US" dirty="0"/>
-              <a:t>Create a production runbook</a:t>
-            </a:r>
-          </a:p>
-          <a:p>
-            <a:pPr lvl="1">
-              <a:buFont typeface="Arial" panose="020B0604020202020204" pitchFamily="34" charset="0"/>
-              <a:buChar char="•"/>
-            </a:pPr>
-            <a:r>
-              <a:rPr lang="en-US" dirty="0"/>
-              <a:t>Enable selective component deployment via CI/CD</a:t>
-            </a:r>
-          </a:p>
-          <a:p>
-            <a:pPr lvl="1">
-              <a:buFont typeface="Arial" panose="020B0604020202020204" pitchFamily="34" charset="0"/>
-              <a:buChar char="•"/>
-            </a:pPr>
-            <a:endParaRPr lang="en-US" dirty="0"/>
+              <a:t>Dead‑letter queues for failures </a:t>
+            </a:r>
+            <a:endParaRPr lang="en-US" sz="1800" dirty="0"/>
           </a:p>
         </p:txBody>
       </p:sp>
     </p:spTree>
     <p:extLst>
       <p:ext uri="{BB962C8B-B14F-4D97-AF65-F5344CB8AC3E}">
-        <p14:creationId xmlns:p14="http://schemas.microsoft.com/office/powerpoint/2010/main" val="543687377"/>
+        <p14:creationId xmlns:p14="http://schemas.microsoft.com/office/powerpoint/2010/main" val="3080688197"/>
       </p:ext>
     </p:extLst>
   </p:cSld>
@@ -8028,7 +8021,7 @@
           <p:cNvPr id="2" name="Title 1">
             <a:extLst>
               <a:ext uri="{FF2B5EF4-FFF2-40B4-BE49-F238E27FC236}">
-                <a16:creationId xmlns:a16="http://schemas.microsoft.com/office/drawing/2014/main" id="{4B329354-99E0-A37A-5E65-73AC8597F050}"/>
+                <a16:creationId xmlns:a16="http://schemas.microsoft.com/office/drawing/2014/main" id="{C1E1388F-032E-A62F-6523-BC89A0CCA962}"/>
               </a:ext>
             </a:extLst>
           </p:cNvPr>
@@ -8046,7 +8039,7 @@
           <a:p>
             <a:r>
               <a:rPr lang="en-US" dirty="0"/>
-              <a:t>Scalability</a:t>
+              <a:t>Improvements/Open Items</a:t>
             </a:r>
           </a:p>
         </p:txBody>
@@ -8056,7 +8049,7 @@
           <p:cNvPr id="3" name="Content Placeholder 2">
             <a:extLst>
               <a:ext uri="{FF2B5EF4-FFF2-40B4-BE49-F238E27FC236}">
-                <a16:creationId xmlns:a16="http://schemas.microsoft.com/office/drawing/2014/main" id="{3C94D4B2-F219-D30B-B97F-3DF9AC496B76}"/>
+                <a16:creationId xmlns:a16="http://schemas.microsoft.com/office/drawing/2014/main" id="{448B38BD-EBC0-FCE6-0D53-05C3838FC384}"/>
               </a:ext>
             </a:extLst>
           </p:cNvPr>
@@ -8080,7 +8073,7 @@
             </a:pPr>
             <a:r>
               <a:rPr lang="en-US" dirty="0"/>
-              <a:t>AWS Glue with Spark for large datasets</a:t>
+              <a:t>Introduce SQS/SNS for buffering and notifications</a:t>
             </a:r>
           </a:p>
           <a:p>
@@ -8090,7 +8083,7 @@
             </a:pPr>
             <a:r>
               <a:rPr lang="en-US" dirty="0"/>
-              <a:t>Dynamic Spark configuration based on file size</a:t>
+              <a:t>Expand DynamoDB metadata model</a:t>
             </a:r>
           </a:p>
           <a:p>
@@ -8100,27 +8093,7 @@
             </a:pPr>
             <a:r>
               <a:rPr lang="en-US" dirty="0"/>
-              <a:t>Streaming Option </a:t>
-            </a:r>
-          </a:p>
-          <a:p>
-            <a:pPr lvl="2">
-              <a:buFont typeface="Arial" panose="020B0604020202020204" pitchFamily="34" charset="0"/>
-              <a:buChar char="•"/>
-            </a:pPr>
-            <a:r>
-              <a:rPr lang="en-US" dirty="0"/>
-              <a:t>Kinesis → Lambda → Step Functions → Glue Streaming → S3 → DynamoDB</a:t>
-            </a:r>
-          </a:p>
-          <a:p>
-            <a:pPr lvl="2">
-              <a:buFont typeface="Arial" panose="020B0604020202020204" pitchFamily="34" charset="0"/>
-              <a:buChar char="•"/>
-            </a:pPr>
-            <a:r>
-              <a:rPr lang="en-US" dirty="0"/>
-              <a:t>Reliability &amp; Monitoring</a:t>
+              <a:t>Support multiple input files using manifest files</a:t>
             </a:r>
           </a:p>
           <a:p>
@@ -8130,7 +8103,7 @@
             </a:pPr>
             <a:r>
               <a:rPr lang="en-US" dirty="0"/>
-              <a:t>CloudWatch metrics and alarms</a:t>
+              <a:t>Handle different file formats (parquet), multiple delimiters (comma, pipe)</a:t>
             </a:r>
           </a:p>
           <a:p>
@@ -8140,7 +8113,7 @@
             </a:pPr>
             <a:r>
               <a:rPr lang="en-US" dirty="0"/>
-              <a:t>SNS notifications</a:t>
+              <a:t>Schema validation using Glue Catalog &amp; Crawlers</a:t>
             </a:r>
           </a:p>
           <a:p>
@@ -8150,7 +8123,7 @@
             </a:pPr>
             <a:r>
               <a:rPr lang="en-US" dirty="0"/>
-              <a:t>Lambda retry policies</a:t>
+              <a:t>Data quality checks on output data</a:t>
             </a:r>
           </a:p>
           <a:p>
@@ -8160,16 +8133,52 @@
             </a:pPr>
             <a:r>
               <a:rPr lang="en-US" dirty="0"/>
-              <a:t>Dead‑letter queues for failures </a:t>
-            </a:r>
-            <a:endParaRPr lang="en-US" sz="1800" dirty="0"/>
+              <a:t>Standardize product naming and keywords</a:t>
+            </a:r>
+          </a:p>
+          <a:p>
+            <a:pPr lvl="1">
+              <a:buFont typeface="Arial" panose="020B0604020202020204" pitchFamily="34" charset="0"/>
+              <a:buChar char="•"/>
+            </a:pPr>
+            <a:r>
+              <a:rPr lang="en-US" dirty="0"/>
+              <a:t>Improve logging, tagging, and retention</a:t>
+            </a:r>
+          </a:p>
+          <a:p>
+            <a:pPr lvl="1">
+              <a:buFont typeface="Arial" panose="020B0604020202020204" pitchFamily="34" charset="0"/>
+              <a:buChar char="•"/>
+            </a:pPr>
+            <a:r>
+              <a:rPr lang="en-US" dirty="0"/>
+              <a:t>Create a production runbook</a:t>
+            </a:r>
+          </a:p>
+          <a:p>
+            <a:pPr lvl="1">
+              <a:buFont typeface="Arial" panose="020B0604020202020204" pitchFamily="34" charset="0"/>
+              <a:buChar char="•"/>
+            </a:pPr>
+            <a:r>
+              <a:rPr lang="en-US" dirty="0"/>
+              <a:t>Enable selective component deployment via CI/CD</a:t>
+            </a:r>
+          </a:p>
+          <a:p>
+            <a:pPr lvl="1">
+              <a:buFont typeface="Arial" panose="020B0604020202020204" pitchFamily="34" charset="0"/>
+              <a:buChar char="•"/>
+            </a:pPr>
+            <a:endParaRPr lang="en-US" dirty="0"/>
           </a:p>
         </p:txBody>
       </p:sp>
     </p:spTree>
     <p:extLst>
       <p:ext uri="{BB962C8B-B14F-4D97-AF65-F5344CB8AC3E}">
-        <p14:creationId xmlns:p14="http://schemas.microsoft.com/office/powerpoint/2010/main" val="3080688197"/>
+        <p14:creationId xmlns:p14="http://schemas.microsoft.com/office/powerpoint/2010/main" val="543687377"/>
       </p:ext>
     </p:extLst>
   </p:cSld>
@@ -8221,10 +8230,6 @@
               <a:rPr lang="en-US" dirty="0"/>
               <a:t>Additional Documentation</a:t>
             </a:r>
-            <a:br>
-              <a:rPr lang="en-US" dirty="0"/>
-            </a:br>
-            <a:endParaRPr lang="en-US" dirty="0"/>
           </a:p>
         </p:txBody>
       </p:sp>

--- a/Documents/SalesAnalysis_FrameWork.pptx
+++ b/Documents/SalesAnalysis_FrameWork.pptx
@@ -126,7 +126,7 @@
 <file path=ppt/revisionInfo.xml><?xml version="1.0" encoding="utf-8"?>
 <p1510:revInfo xmlns:a="http://schemas.openxmlformats.org/drawingml/2006/main" xmlns:r="http://schemas.openxmlformats.org/officeDocument/2006/relationships" xmlns:p1510="http://schemas.microsoft.com/office/powerpoint/2015/10/main">
   <p1510:revLst>
-    <p1510:client id="{2B2209F0-BDE7-45E7-803F-D0546AA3A300}" v="1" dt="2026-03-06T11:18:55.725"/>
+    <p1510:client id="{2B2209F0-BDE7-45E7-803F-D0546AA3A300}" v="3" dt="2026-03-06T12:00:53.899"/>
     <p1510:client id="{912109E2-55E3-4DE1-90FF-B564DE695E44}" v="72" dt="2026-03-06T07:37:43.733"/>
     <p1510:client id="{AD710007-99E5-4D0E-87C7-B7CFF48C7ABB}" v="44" dt="2026-03-06T02:49:07.537"/>
   </p1510:revLst>
@@ -138,12 +138,12 @@
   <pc:docChgLst>
     <pc:chgData name="bharath u" userId="c58c4ed255503daa" providerId="LiveId" clId="{5F7C9199-54C3-4129-A0AC-0FF32D78B41F}"/>
     <pc:docChg chg="undo custSel addSld delSld modSld sldOrd">
-      <pc:chgData name="bharath u" userId="c58c4ed255503daa" providerId="LiveId" clId="{5F7C9199-54C3-4129-A0AC-0FF32D78B41F}" dt="2026-03-06T11:18:57.241" v="801" actId="20577"/>
+      <pc:chgData name="bharath u" userId="c58c4ed255503daa" providerId="LiveId" clId="{5F7C9199-54C3-4129-A0AC-0FF32D78B41F}" dt="2026-03-06T12:00:53.899" v="805" actId="20577"/>
       <pc:docMkLst>
         <pc:docMk/>
       </pc:docMkLst>
       <pc:sldChg chg="addSp modSp mod addAnim">
-        <pc:chgData name="bharath u" userId="c58c4ed255503daa" providerId="LiveId" clId="{5F7C9199-54C3-4129-A0AC-0FF32D78B41F}" dt="2026-03-06T05:42:23.475" v="152" actId="113"/>
+        <pc:chgData name="bharath u" userId="c58c4ed255503daa" providerId="LiveId" clId="{5F7C9199-54C3-4129-A0AC-0FF32D78B41F}" dt="2026-03-06T12:00:53.899" v="805" actId="20577"/>
         <pc:sldMkLst>
           <pc:docMk/>
           <pc:sldMk cId="868654895" sldId="256"/>
@@ -157,7 +157,7 @@
           </ac:spMkLst>
         </pc:spChg>
         <pc:spChg chg="mod">
-          <ac:chgData name="bharath u" userId="c58c4ed255503daa" providerId="LiveId" clId="{5F7C9199-54C3-4129-A0AC-0FF32D78B41F}" dt="2026-03-06T05:42:23.475" v="152" actId="113"/>
+          <ac:chgData name="bharath u" userId="c58c4ed255503daa" providerId="LiveId" clId="{5F7C9199-54C3-4129-A0AC-0FF32D78B41F}" dt="2026-03-06T12:00:53.899" v="805" actId="20577"/>
           <ac:spMkLst>
             <pc:docMk/>
             <pc:sldMk cId="868654895" sldId="256"/>
@@ -567,7 +567,7 @@
         </pc:spChg>
       </pc:sldChg>
       <pc:sldChg chg="addSp delSp modSp mod">
-        <pc:chgData name="bharath u" userId="c58c4ed255503daa" providerId="LiveId" clId="{5F7C9199-54C3-4129-A0AC-0FF32D78B41F}" dt="2026-03-06T11:18:46.031" v="799" actId="478"/>
+        <pc:chgData name="bharath u" userId="c58c4ed255503daa" providerId="LiveId" clId="{5F7C9199-54C3-4129-A0AC-0FF32D78B41F}" dt="2026-03-06T12:00:49.007" v="804" actId="1076"/>
         <pc:sldMkLst>
           <pc:docMk/>
           <pc:sldMk cId="1779968709" sldId="266"/>
@@ -588,6 +588,14 @@
             <ac:spMk id="3" creationId="{9CE482F7-AE1E-E324-85E5-EB48925FA79E}"/>
           </ac:spMkLst>
         </pc:spChg>
+        <pc:graphicFrameChg chg="add mod">
+          <ac:chgData name="bharath u" userId="c58c4ed255503daa" providerId="LiveId" clId="{5F7C9199-54C3-4129-A0AC-0FF32D78B41F}" dt="2026-03-06T12:00:49.007" v="804" actId="1076"/>
+          <ac:graphicFrameMkLst>
+            <pc:docMk/>
+            <pc:sldMk cId="1779968709" sldId="266"/>
+            <ac:graphicFrameMk id="4" creationId="{37314922-FF94-54A3-F8BD-E972CA4C0976}"/>
+          </ac:graphicFrameMkLst>
+        </pc:graphicFrameChg>
         <pc:graphicFrameChg chg="del">
           <ac:chgData name="bharath u" userId="c58c4ed255503daa" providerId="LiveId" clId="{5F7C9199-54C3-4129-A0AC-0FF32D78B41F}" dt="2026-03-06T07:15:37.482" v="789" actId="478"/>
           <ac:graphicFrameMkLst>
@@ -597,7 +605,7 @@
           </ac:graphicFrameMkLst>
         </pc:graphicFrameChg>
         <pc:graphicFrameChg chg="add del mod">
-          <ac:chgData name="bharath u" userId="c58c4ed255503daa" providerId="LiveId" clId="{5F7C9199-54C3-4129-A0AC-0FF32D78B41F}" dt="2026-03-06T11:18:46.031" v="799" actId="478"/>
+          <ac:chgData name="bharath u" userId="c58c4ed255503daa" providerId="LiveId" clId="{5F7C9199-54C3-4129-A0AC-0FF32D78B41F}" dt="2026-03-06T12:00:23.748" v="802" actId="478"/>
           <ac:graphicFrameMkLst>
             <pc:docMk/>
             <pc:sldMk cId="1779968709" sldId="266"/>
@@ -5694,8 +5702,21 @@
                   <a:srgbClr val="FFFFFF"/>
                 </a:solidFill>
               </a:rPr>
-              <a:t>Automated, scalable processing of web sales and search data</a:t>
-            </a:r>
+              <a:t>Automated, scalable processing of web sales and </a:t>
+            </a:r>
+            <a:r>
+              <a:rPr lang="en-US" b="1">
+                <a:solidFill>
+                  <a:srgbClr val="FFFFFF"/>
+                </a:solidFill>
+              </a:rPr>
+              <a:t>search data </a:t>
+            </a:r>
+            <a:endParaRPr lang="en-US" b="1" dirty="0">
+              <a:solidFill>
+                <a:srgbClr val="FFFFFF"/>
+              </a:solidFill>
+            </a:endParaRPr>
           </a:p>
         </p:txBody>
       </p:sp>
@@ -8381,10 +8402,10 @@
       </p:graphicFrame>
       <p:graphicFrame>
         <p:nvGraphicFramePr>
-          <p:cNvPr id="7" name="Object 6">
+          <p:cNvPr id="4" name="Object 3">
             <a:extLst>
               <a:ext uri="{FF2B5EF4-FFF2-40B4-BE49-F238E27FC236}">
-                <a16:creationId xmlns:a16="http://schemas.microsoft.com/office/drawing/2014/main" id="{F0245E00-F4DC-89EA-DB65-06933D3ABFA2}"/>
+                <a16:creationId xmlns:a16="http://schemas.microsoft.com/office/drawing/2014/main" id="{37314922-FF94-54A3-F8BD-E972CA4C0976}"/>
               </a:ext>
             </a:extLst>
           </p:cNvPr>
@@ -8394,13 +8415,13 @@
           <p:nvPr>
             <p:extLst>
               <p:ext uri="{D42A27DB-BD31-4B8C-83A1-F6EECF244321}">
-                <p14:modId xmlns:p14="http://schemas.microsoft.com/office/powerpoint/2010/main" val="3582001568"/>
+                <p14:modId xmlns:p14="http://schemas.microsoft.com/office/powerpoint/2010/main" val="535323685"/>
               </p:ext>
             </p:extLst>
           </p:nvPr>
         </p:nvGraphicFramePr>
         <p:xfrm>
-          <a:off x="1800225" y="3710517"/>
+          <a:off x="1800225" y="3642784"/>
           <a:ext cx="914400" cy="806450"/>
         </p:xfrm>
         <a:graphic>
@@ -8416,10 +8437,10 @@
                   <p:embed/>
                   <p:pic>
                     <p:nvPicPr>
-                      <p:cNvPr id="7" name="Object 6">
+                      <p:cNvPr id="4" name="Object 3">
                         <a:extLst>
                           <a:ext uri="{FF2B5EF4-FFF2-40B4-BE49-F238E27FC236}">
-                            <a16:creationId xmlns:a16="http://schemas.microsoft.com/office/drawing/2014/main" id="{F0245E00-F4DC-89EA-DB65-06933D3ABFA2}"/>
+                            <a16:creationId xmlns:a16="http://schemas.microsoft.com/office/drawing/2014/main" id="{37314922-FF94-54A3-F8BD-E972CA4C0976}"/>
                           </a:ext>
                         </a:extLst>
                       </p:cNvPr>
@@ -8434,7 +8455,7 @@
                     </p:blipFill>
                     <p:spPr>
                       <a:xfrm>
-                        <a:off x="1800225" y="3710517"/>
+                        <a:off x="1800225" y="3642784"/>
                         <a:ext cx="914400" cy="806450"/>
                       </a:xfrm>
                       <a:prstGeom prst="rect">

--- a/Documents/SalesAnalysis_FrameWork.pptx
+++ b/Documents/SalesAnalysis_FrameWork.pptx
@@ -126,7 +126,7 @@
 <file path=ppt/revisionInfo.xml><?xml version="1.0" encoding="utf-8"?>
 <p1510:revInfo xmlns:a="http://schemas.openxmlformats.org/drawingml/2006/main" xmlns:r="http://schemas.openxmlformats.org/officeDocument/2006/relationships" xmlns:p1510="http://schemas.microsoft.com/office/powerpoint/2015/10/main">
   <p1510:revLst>
-    <p1510:client id="{2B2209F0-BDE7-45E7-803F-D0546AA3A300}" v="3" dt="2026-03-06T12:00:53.899"/>
+    <p1510:client id="{2B2209F0-BDE7-45E7-803F-D0546AA3A300}" v="10" dt="2026-03-06T12:05:30.418"/>
     <p1510:client id="{912109E2-55E3-4DE1-90FF-B564DE695E44}" v="72" dt="2026-03-06T07:37:43.733"/>
     <p1510:client id="{AD710007-99E5-4D0E-87C7-B7CFF48C7ABB}" v="44" dt="2026-03-06T02:49:07.537"/>
   </p1510:revLst>
@@ -138,18 +138,18 @@
   <pc:docChgLst>
     <pc:chgData name="bharath u" userId="c58c4ed255503daa" providerId="LiveId" clId="{5F7C9199-54C3-4129-A0AC-0FF32D78B41F}"/>
     <pc:docChg chg="undo custSel addSld delSld modSld sldOrd">
-      <pc:chgData name="bharath u" userId="c58c4ed255503daa" providerId="LiveId" clId="{5F7C9199-54C3-4129-A0AC-0FF32D78B41F}" dt="2026-03-06T12:00:53.899" v="805" actId="20577"/>
+      <pc:chgData name="bharath u" userId="c58c4ed255503daa" providerId="LiveId" clId="{5F7C9199-54C3-4129-A0AC-0FF32D78B41F}" dt="2026-03-06T12:05:30.418" v="812" actId="20577"/>
       <pc:docMkLst>
         <pc:docMk/>
       </pc:docMkLst>
       <pc:sldChg chg="addSp modSp mod addAnim">
-        <pc:chgData name="bharath u" userId="c58c4ed255503daa" providerId="LiveId" clId="{5F7C9199-54C3-4129-A0AC-0FF32D78B41F}" dt="2026-03-06T12:00:53.899" v="805" actId="20577"/>
+        <pc:chgData name="bharath u" userId="c58c4ed255503daa" providerId="LiveId" clId="{5F7C9199-54C3-4129-A0AC-0FF32D78B41F}" dt="2026-03-06T12:05:30.418" v="812" actId="20577"/>
         <pc:sldMkLst>
           <pc:docMk/>
           <pc:sldMk cId="868654895" sldId="256"/>
         </pc:sldMkLst>
         <pc:spChg chg="mod">
-          <ac:chgData name="bharath u" userId="c58c4ed255503daa" providerId="LiveId" clId="{5F7C9199-54C3-4129-A0AC-0FF32D78B41F}" dt="2026-03-06T05:42:19.898" v="151" actId="113"/>
+          <ac:chgData name="bharath u" userId="c58c4ed255503daa" providerId="LiveId" clId="{5F7C9199-54C3-4129-A0AC-0FF32D78B41F}" dt="2026-03-06T12:05:30.418" v="812" actId="20577"/>
           <ac:spMkLst>
             <pc:docMk/>
             <pc:sldMk cId="868654895" sldId="256"/>
@@ -5600,8 +5600,12 @@
           <a:lstStyle/>
           <a:p>
             <a:r>
+              <a:rPr lang="en-US" b="1"/>
+              <a:t>Search Revenue </a:t>
+            </a:r>
+            <a:r>
               <a:rPr lang="en-US" b="1" dirty="0"/>
-              <a:t>Revenue Analysis</a:t>
+              <a:t>Analysis</a:t>
             </a:r>
           </a:p>
         </p:txBody>

--- a/Documents/SalesAnalysis_FrameWork.pptx
+++ b/Documents/SalesAnalysis_FrameWork.pptx
@@ -5714,7 +5714,7 @@
                   <a:srgbClr val="FFFFFF"/>
                 </a:solidFill>
               </a:rPr>
-              <a:t>search data </a:t>
+              <a:t>search data</a:t>
             </a:r>
             <a:endParaRPr lang="en-US" b="1" dirty="0">
               <a:solidFill>
@@ -8188,15 +8188,8 @@
             </a:pPr>
             <a:r>
               <a:rPr lang="en-US" dirty="0"/>
-              <a:t>Enable selective component deployment via CI/CD</a:t>
-            </a:r>
-          </a:p>
-          <a:p>
-            <a:pPr lvl="1">
-              <a:buFont typeface="Arial" panose="020B0604020202020204" pitchFamily="34" charset="0"/>
-              <a:buChar char="•"/>
-            </a:pPr>
-            <a:endParaRPr lang="en-US" dirty="0"/>
+              <a:t>Enable selective component deployment via CI/CD and expand for S3 Bucket, Event and Dynamo DB table creation</a:t>
+            </a:r>
           </a:p>
         </p:txBody>
       </p:sp>

--- a/Documents/SalesAnalysis_FrameWork.pptx
+++ b/Documents/SalesAnalysis_FrameWork.pptx
@@ -138,7 +138,7 @@
   <pc:docChgLst>
     <pc:chgData name="bharath u" userId="c58c4ed255503daa" providerId="LiveId" clId="{5F7C9199-54C3-4129-A0AC-0FF32D78B41F}"/>
     <pc:docChg chg="undo custSel addSld delSld modSld sldOrd">
-      <pc:chgData name="bharath u" userId="c58c4ed255503daa" providerId="LiveId" clId="{5F7C9199-54C3-4129-A0AC-0FF32D78B41F}" dt="2026-03-06T12:05:30.418" v="812" actId="20577"/>
+      <pc:chgData name="bharath u" userId="c58c4ed255503daa" providerId="LiveId" clId="{5F7C9199-54C3-4129-A0AC-0FF32D78B41F}" dt="2026-03-06T17:56:12.497" v="1009" actId="20577"/>
       <pc:docMkLst>
         <pc:docMk/>
       </pc:docMkLst>
@@ -537,13 +537,13 @@
         </pc:graphicFrameChg>
       </pc:sldChg>
       <pc:sldChg chg="modSp mod">
-        <pc:chgData name="bharath u" userId="c58c4ed255503daa" providerId="LiveId" clId="{5F7C9199-54C3-4129-A0AC-0FF32D78B41F}" dt="2026-03-06T06:19:41.019" v="768" actId="20577"/>
+        <pc:chgData name="bharath u" userId="c58c4ed255503daa" providerId="LiveId" clId="{5F7C9199-54C3-4129-A0AC-0FF32D78B41F}" dt="2026-03-06T17:56:12.497" v="1009" actId="20577"/>
         <pc:sldMkLst>
           <pc:docMk/>
           <pc:sldMk cId="543687377" sldId="263"/>
         </pc:sldMkLst>
         <pc:spChg chg="mod">
-          <ac:chgData name="bharath u" userId="c58c4ed255503daa" providerId="LiveId" clId="{5F7C9199-54C3-4129-A0AC-0FF32D78B41F}" dt="2026-03-06T06:19:41.019" v="768" actId="20577"/>
+          <ac:chgData name="bharath u" userId="c58c4ed255503daa" providerId="LiveId" clId="{5F7C9199-54C3-4129-A0AC-0FF32D78B41F}" dt="2026-03-06T17:56:12.497" v="1009" actId="20577"/>
           <ac:spMkLst>
             <pc:docMk/>
             <pc:sldMk cId="543687377" sldId="263"/>
@@ -8088,7 +8088,7 @@
         <p:spPr/>
         <p:txBody>
           <a:bodyPr>
-            <a:normAutofit/>
+            <a:normAutofit lnSpcReduction="10000"/>
           </a:bodyPr>
           <a:lstStyle/>
           <a:p>
@@ -8120,6 +8120,31 @@
               <a:rPr lang="en-US" dirty="0"/>
               <a:t>Support multiple input files using manifest files</a:t>
             </a:r>
+          </a:p>
+          <a:p>
+            <a:pPr lvl="1">
+              <a:buFont typeface="Arial" panose="020B0604020202020204" pitchFamily="34" charset="0"/>
+              <a:buChar char="•"/>
+            </a:pPr>
+            <a:r>
+              <a:rPr lang="en-US" dirty="0"/>
+              <a:t>Adding a stage layer to store the raw source file copy in parquet format</a:t>
+            </a:r>
+          </a:p>
+          <a:p>
+            <a:pPr lvl="3">
+              <a:buFont typeface="Arial" panose="020B0604020202020204" pitchFamily="34" charset="0"/>
+              <a:buChar char="•"/>
+            </a:pPr>
+            <a:r>
+              <a:rPr lang="en-US" dirty="0"/>
+              <a:t>This will help in maintaining historical source data copies and for reprocessing of data </a:t>
+            </a:r>
+            <a:r>
+              <a:rPr lang="en-US"/>
+              <a:t>if needed </a:t>
+            </a:r>
+            <a:endParaRPr lang="en-US" dirty="0"/>
           </a:p>
           <a:p>
             <a:pPr lvl="1">
